--- a/Chapter 14 Text classification.pptx
+++ b/Chapter 14 Text classification.pptx
@@ -5,10 +5,10 @@
     <p:sldMasterId id="2147483660" r:id="rId1"/>
   </p:sldMasterIdLst>
   <p:notesMasterIdLst>
-    <p:notesMasterId r:id="rId16"/>
+    <p:notesMasterId r:id="rId17"/>
   </p:notesMasterIdLst>
   <p:handoutMasterIdLst>
-    <p:handoutMasterId r:id="rId17"/>
+    <p:handoutMasterId r:id="rId18"/>
   </p:handoutMasterIdLst>
   <p:sldIdLst>
     <p:sldId id="256" r:id="rId2"/>
@@ -24,7 +24,8 @@
     <p:sldId id="1144" r:id="rId12"/>
     <p:sldId id="1145" r:id="rId13"/>
     <p:sldId id="1147" r:id="rId14"/>
-    <p:sldId id="1146" r:id="rId15"/>
+    <p:sldId id="1148" r:id="rId15"/>
+    <p:sldId id="1146" r:id="rId16"/>
   </p:sldIdLst>
   <p:sldSz cx="12192000" cy="6858000"/>
   <p:notesSz cx="6858000" cy="9144000"/>
@@ -145,6 +146,7 @@
             <p14:sldId id="1144"/>
             <p14:sldId id="1145"/>
             <p14:sldId id="1147"/>
+            <p14:sldId id="1148"/>
             <p14:sldId id="1146"/>
           </p14:sldIdLst>
         </p14:section>
@@ -4661,6 +4663,464 @@
         <p:cNvPr id="1" name="">
           <a:extLst>
             <a:ext uri="{FF2B5EF4-FFF2-40B4-BE49-F238E27FC236}">
+              <a16:creationId xmlns:a16="http://schemas.microsoft.com/office/drawing/2014/main" id="{5A627C3A-51DD-635B-EF83-A40215BABB9C}"/>
+            </a:ext>
+          </a:extLst>
+        </p:cNvPr>
+        <p:cNvGrpSpPr/>
+        <p:nvPr/>
+      </p:nvGrpSpPr>
+      <p:grpSpPr>
+        <a:xfrm>
+          <a:off x="0" y="0"/>
+          <a:ext cx="0" cy="0"/>
+          <a:chOff x="0" y="0"/>
+          <a:chExt cx="0" cy="0"/>
+        </a:xfrm>
+      </p:grpSpPr>
+      <p:sp>
+        <p:nvSpPr>
+          <p:cNvPr id="4" name="슬라이드 번호 개체 틀 3">
+            <a:extLst>
+              <a:ext uri="{FF2B5EF4-FFF2-40B4-BE49-F238E27FC236}">
+                <a16:creationId xmlns:a16="http://schemas.microsoft.com/office/drawing/2014/main" id="{332A854D-BD54-DC42-7E34-EB6160D66102}"/>
+              </a:ext>
+            </a:extLst>
+          </p:cNvPr>
+          <p:cNvSpPr>
+            <a:spLocks noGrp="1"/>
+          </p:cNvSpPr>
+          <p:nvPr>
+            <p:ph type="sldNum" sz="quarter" idx="12"/>
+          </p:nvPr>
+        </p:nvSpPr>
+        <p:spPr>
+          <a:xfrm>
+            <a:off x="10514011" y="6036261"/>
+            <a:ext cx="753545" cy="365125"/>
+          </a:xfrm>
+        </p:spPr>
+        <p:txBody>
+          <a:bodyPr/>
+          <a:lstStyle/>
+          <a:p>
+            <a:fld id="{D57F1E4F-1CFF-5643-939E-217C01CDF565}" type="slidenum">
+              <a:rPr lang="en-US" smtClean="0"/>
+              <a:pPr/>
+              <a:t>14</a:t>
+            </a:fld>
+            <a:endParaRPr lang="en-US" dirty="0"/>
+          </a:p>
+        </p:txBody>
+      </p:sp>
+      <p:sp>
+        <p:nvSpPr>
+          <p:cNvPr id="3" name="제목 1">
+            <a:extLst>
+              <a:ext uri="{FF2B5EF4-FFF2-40B4-BE49-F238E27FC236}">
+                <a16:creationId xmlns:a16="http://schemas.microsoft.com/office/drawing/2014/main" id="{7EBD2522-979D-112D-215E-E0216EB7981F}"/>
+              </a:ext>
+            </a:extLst>
+          </p:cNvPr>
+          <p:cNvSpPr txBox="1">
+            <a:spLocks/>
+          </p:cNvSpPr>
+          <p:nvPr/>
+        </p:nvSpPr>
+        <p:spPr>
+          <a:xfrm>
+            <a:off x="475645" y="481983"/>
+            <a:ext cx="11076274" cy="766439"/>
+          </a:xfrm>
+          <a:prstGeom prst="rect">
+            <a:avLst/>
+          </a:prstGeom>
+        </p:spPr>
+        <p:txBody>
+          <a:bodyPr vert="horz" lIns="91440" tIns="45720" rIns="91440" bIns="45720" rtlCol="0" anchor="ctr">
+            <a:normAutofit/>
+          </a:bodyPr>
+          <a:lstStyle>
+            <a:lvl1pPr algn="ctr" defTabSz="914400" rtl="0" eaLnBrk="1" latinLnBrk="1" hangingPunct="1">
+              <a:lnSpc>
+                <a:spcPct val="90000"/>
+              </a:lnSpc>
+              <a:spcBef>
+                <a:spcPct val="0"/>
+              </a:spcBef>
+              <a:buNone/>
+              <a:defRPr sz="3200" kern="1200" cap="all" baseline="0">
+                <a:solidFill>
+                  <a:schemeClr val="tx1"/>
+                </a:solidFill>
+                <a:effectLst/>
+                <a:latin typeface="Batang" panose="02030600000101010101" pitchFamily="18" charset="-127"/>
+                <a:ea typeface="Batang" panose="02030600000101010101" pitchFamily="18" charset="-127"/>
+                <a:cs typeface="+mj-cs"/>
+              </a:defRPr>
+            </a:lvl1pPr>
+          </a:lstStyle>
+          <a:p>
+            <a:pPr algn="l"/>
+            <a:r>
+              <a:rPr lang="en-US" altLang="ko-KR" sz="2800" cap="none" dirty="0">
+                <a:solidFill>
+                  <a:schemeClr val="bg2">
+                    <a:lumMod val="25000"/>
+                  </a:schemeClr>
+                </a:solidFill>
+                <a:latin typeface="D2Coding" panose="020B0609020101020101" pitchFamily="49" charset="-127"/>
+                <a:ea typeface="D2Coding" panose="020B0609020101020101" pitchFamily="49" charset="-127"/>
+                <a:cs typeface="Segoe UI Light" panose="020B0502040204020203" pitchFamily="34" charset="0"/>
+              </a:rPr>
+              <a:t>Understanding word embeddings</a:t>
+            </a:r>
+          </a:p>
+        </p:txBody>
+      </p:sp>
+      <p:pic>
+        <p:nvPicPr>
+          <p:cNvPr id="2" name="Picture 2">
+            <a:extLst>
+              <a:ext uri="{FF2B5EF4-FFF2-40B4-BE49-F238E27FC236}">
+                <a16:creationId xmlns:a16="http://schemas.microsoft.com/office/drawing/2014/main" id="{6E378C00-FD83-8248-F532-ECF047D1D304}"/>
+              </a:ext>
+            </a:extLst>
+          </p:cNvPr>
+          <p:cNvPicPr>
+            <a:picLocks noChangeAspect="1" noChangeArrowheads="1"/>
+          </p:cNvPicPr>
+          <p:nvPr/>
+        </p:nvPicPr>
+        <p:blipFill>
+          <a:blip r:embed="rId2">
+            <a:extLst>
+              <a:ext uri="{28A0092B-C50C-407E-A947-70E740481C1C}">
+                <a14:useLocalDpi xmlns:a14="http://schemas.microsoft.com/office/drawing/2010/main" val="0"/>
+              </a:ext>
+            </a:extLst>
+          </a:blip>
+          <a:srcRect/>
+          <a:stretch>
+            <a:fillRect/>
+          </a:stretch>
+        </p:blipFill>
+        <p:spPr bwMode="auto">
+          <a:xfrm>
+            <a:off x="629743" y="3207328"/>
+            <a:ext cx="5307538" cy="3051232"/>
+          </a:xfrm>
+          <a:prstGeom prst="rect">
+            <a:avLst/>
+          </a:prstGeom>
+          <a:noFill/>
+          <a:extLst>
+            <a:ext uri="{909E8E84-426E-40DD-AFC4-6F175D3DCCD1}">
+              <a14:hiddenFill xmlns:a14="http://schemas.microsoft.com/office/drawing/2010/main">
+                <a:solidFill>
+                  <a:srgbClr val="FFFFFF"/>
+                </a:solidFill>
+              </a14:hiddenFill>
+            </a:ext>
+          </a:extLst>
+        </p:spPr>
+      </p:pic>
+      <p:sp>
+        <p:nvSpPr>
+          <p:cNvPr id="9" name="TextBox 8">
+            <a:extLst>
+              <a:ext uri="{FF2B5EF4-FFF2-40B4-BE49-F238E27FC236}">
+                <a16:creationId xmlns:a16="http://schemas.microsoft.com/office/drawing/2014/main" id="{2848D389-B97F-24D4-4FE4-21BB63ECEB23}"/>
+              </a:ext>
+            </a:extLst>
+          </p:cNvPr>
+          <p:cNvSpPr txBox="1"/>
+          <p:nvPr/>
+        </p:nvSpPr>
+        <p:spPr>
+          <a:xfrm>
+            <a:off x="629743" y="1326722"/>
+            <a:ext cx="11330275" cy="1296317"/>
+          </a:xfrm>
+          <a:prstGeom prst="rect">
+            <a:avLst/>
+          </a:prstGeom>
+          <a:noFill/>
+        </p:spPr>
+        <p:txBody>
+          <a:bodyPr wrap="square">
+            <a:spAutoFit/>
+          </a:bodyPr>
+          <a:lstStyle/>
+          <a:p>
+            <a:pPr>
+              <a:lnSpc>
+                <a:spcPct val="150000"/>
+              </a:lnSpc>
+            </a:pPr>
+            <a:r>
+              <a:rPr lang="ko-KR" altLang="en-US" dirty="0" err="1">
+                <a:latin typeface="D2Coding" panose="020B0609020101020101" pitchFamily="49" charset="-127"/>
+                <a:ea typeface="D2Coding" panose="020B0609020101020101" pitchFamily="49" charset="-127"/>
+              </a:rPr>
+              <a:t>임베딩</a:t>
+            </a:r>
+            <a:r>
+              <a:rPr lang="ko-KR" altLang="en-US" dirty="0">
+                <a:latin typeface="D2Coding" panose="020B0609020101020101" pitchFamily="49" charset="-127"/>
+                <a:ea typeface="D2Coding" panose="020B0609020101020101" pitchFamily="49" charset="-127"/>
+              </a:rPr>
+              <a:t> 차원이 </a:t>
+            </a:r>
+            <a:r>
+              <a:rPr lang="en-US" altLang="ko-KR" dirty="0">
+                <a:latin typeface="D2Coding" panose="020B0609020101020101" pitchFamily="49" charset="-127"/>
+                <a:ea typeface="D2Coding" panose="020B0609020101020101" pitchFamily="49" charset="-127"/>
+              </a:rPr>
+              <a:t>128</a:t>
+            </a:r>
+            <a:r>
+              <a:rPr lang="ko-KR" altLang="en-US" dirty="0">
+                <a:latin typeface="D2Coding" panose="020B0609020101020101" pitchFamily="49" charset="-127"/>
+                <a:ea typeface="D2Coding" panose="020B0609020101020101" pitchFamily="49" charset="-127"/>
+              </a:rPr>
+              <a:t>이라는 것은</a:t>
+            </a:r>
+            <a:r>
+              <a:rPr lang="en-US" altLang="ko-KR" dirty="0">
+                <a:latin typeface="D2Coding" panose="020B0609020101020101" pitchFamily="49" charset="-127"/>
+                <a:ea typeface="D2Coding" panose="020B0609020101020101" pitchFamily="49" charset="-127"/>
+              </a:rPr>
+              <a:t>, </a:t>
+            </a:r>
+            <a:r>
+              <a:rPr lang="ko-KR" altLang="en-US" dirty="0">
+                <a:latin typeface="D2Coding" panose="020B0609020101020101" pitchFamily="49" charset="-127"/>
+                <a:ea typeface="D2Coding" panose="020B0609020101020101" pitchFamily="49" charset="-127"/>
+              </a:rPr>
+              <a:t>단어 가방</a:t>
+            </a:r>
+            <a:r>
+              <a:rPr lang="en-US" altLang="ko-KR" dirty="0">
+                <a:latin typeface="D2Coding" panose="020B0609020101020101" pitchFamily="49" charset="-127"/>
+                <a:ea typeface="D2Coding" panose="020B0609020101020101" pitchFamily="49" charset="-127"/>
+              </a:rPr>
+              <a:t>(Bag) </a:t>
+            </a:r>
+            <a:r>
+              <a:rPr lang="ko-KR" altLang="en-US" dirty="0">
+                <a:latin typeface="D2Coding" panose="020B0609020101020101" pitchFamily="49" charset="-127"/>
+                <a:ea typeface="D2Coding" panose="020B0609020101020101" pitchFamily="49" charset="-127"/>
+              </a:rPr>
+              <a:t>속에 갇혀 있던 단어들에게 </a:t>
+            </a:r>
+            <a:r>
+              <a:rPr lang="en-US" altLang="ko-KR" dirty="0">
+                <a:latin typeface="D2Coding" panose="020B0609020101020101" pitchFamily="49" charset="-127"/>
+                <a:ea typeface="D2Coding" panose="020B0609020101020101" pitchFamily="49" charset="-127"/>
+              </a:rPr>
+              <a:t>128</a:t>
+            </a:r>
+            <a:r>
+              <a:rPr lang="ko-KR" altLang="en-US" dirty="0">
+                <a:latin typeface="D2Coding" panose="020B0609020101020101" pitchFamily="49" charset="-127"/>
+                <a:ea typeface="D2Coding" panose="020B0609020101020101" pitchFamily="49" charset="-127"/>
+              </a:rPr>
+              <a:t>가지의 서로 다른 성질</a:t>
+            </a:r>
+            <a:r>
+              <a:rPr lang="en-US" altLang="ko-KR" dirty="0">
+                <a:latin typeface="D2Coding" panose="020B0609020101020101" pitchFamily="49" charset="-127"/>
+                <a:ea typeface="D2Coding" panose="020B0609020101020101" pitchFamily="49" charset="-127"/>
+              </a:rPr>
+              <a:t>(</a:t>
+            </a:r>
+            <a:r>
+              <a:rPr lang="ko-KR" altLang="en-US" dirty="0">
+                <a:latin typeface="D2Coding" panose="020B0609020101020101" pitchFamily="49" charset="-127"/>
+                <a:ea typeface="D2Coding" panose="020B0609020101020101" pitchFamily="49" charset="-127"/>
+              </a:rPr>
+              <a:t>특징 축</a:t>
+            </a:r>
+            <a:r>
+              <a:rPr lang="en-US" altLang="ko-KR" dirty="0">
+                <a:latin typeface="D2Coding" panose="020B0609020101020101" pitchFamily="49" charset="-127"/>
+                <a:ea typeface="D2Coding" panose="020B0609020101020101" pitchFamily="49" charset="-127"/>
+              </a:rPr>
+              <a:t>)</a:t>
+            </a:r>
+            <a:r>
+              <a:rPr lang="ko-KR" altLang="en-US" dirty="0">
+                <a:latin typeface="D2Coding" panose="020B0609020101020101" pitchFamily="49" charset="-127"/>
+                <a:ea typeface="D2Coding" panose="020B0609020101020101" pitchFamily="49" charset="-127"/>
+              </a:rPr>
+              <a:t>을 부여하여</a:t>
+            </a:r>
+            <a:r>
+              <a:rPr lang="en-US" altLang="ko-KR" dirty="0">
+                <a:latin typeface="D2Coding" panose="020B0609020101020101" pitchFamily="49" charset="-127"/>
+                <a:ea typeface="D2Coding" panose="020B0609020101020101" pitchFamily="49" charset="-127"/>
+              </a:rPr>
+              <a:t>, </a:t>
+            </a:r>
+            <a:r>
+              <a:rPr lang="ko-KR" altLang="en-US" dirty="0">
+                <a:latin typeface="D2Coding" panose="020B0609020101020101" pitchFamily="49" charset="-127"/>
+                <a:ea typeface="D2Coding" panose="020B0609020101020101" pitchFamily="49" charset="-127"/>
+              </a:rPr>
+              <a:t>단어 간의 유사도와 문맥적 뉘앙스를 컴퓨터가 다차원 좌표계 위에서 정교하게 계산할 수 있도록 만든 방의 개수</a:t>
+            </a:r>
+            <a:r>
+              <a:rPr lang="en-US" altLang="ko-KR" dirty="0">
+                <a:latin typeface="D2Coding" panose="020B0609020101020101" pitchFamily="49" charset="-127"/>
+                <a:ea typeface="D2Coding" panose="020B0609020101020101" pitchFamily="49" charset="-127"/>
+              </a:rPr>
+              <a:t>(</a:t>
+            </a:r>
+            <a:r>
+              <a:rPr lang="ko-KR" altLang="en-US" dirty="0">
+                <a:latin typeface="D2Coding" panose="020B0609020101020101" pitchFamily="49" charset="-127"/>
+                <a:ea typeface="D2Coding" panose="020B0609020101020101" pitchFamily="49" charset="-127"/>
+              </a:rPr>
+              <a:t>차원</a:t>
+            </a:r>
+            <a:r>
+              <a:rPr lang="en-US" altLang="ko-KR" dirty="0">
+                <a:latin typeface="D2Coding" panose="020B0609020101020101" pitchFamily="49" charset="-127"/>
+                <a:ea typeface="D2Coding" panose="020B0609020101020101" pitchFamily="49" charset="-127"/>
+              </a:rPr>
+              <a:t>)</a:t>
+            </a:r>
+            <a:endParaRPr lang="ko-KR" altLang="en-US" dirty="0">
+              <a:latin typeface="D2Coding" panose="020B0609020101020101" pitchFamily="49" charset="-127"/>
+              <a:ea typeface="D2Coding" panose="020B0609020101020101" pitchFamily="49" charset="-127"/>
+            </a:endParaRPr>
+          </a:p>
+        </p:txBody>
+      </p:sp>
+      <p:sp>
+        <p:nvSpPr>
+          <p:cNvPr id="10" name="TextBox 9">
+            <a:extLst>
+              <a:ext uri="{FF2B5EF4-FFF2-40B4-BE49-F238E27FC236}">
+                <a16:creationId xmlns:a16="http://schemas.microsoft.com/office/drawing/2014/main" id="{16CBE333-2335-6573-5323-36199925A0A7}"/>
+              </a:ext>
+            </a:extLst>
+          </p:cNvPr>
+          <p:cNvSpPr txBox="1"/>
+          <p:nvPr/>
+        </p:nvSpPr>
+        <p:spPr>
+          <a:xfrm>
+            <a:off x="7426960" y="3540464"/>
+            <a:ext cx="2331087" cy="369332"/>
+          </a:xfrm>
+          <a:prstGeom prst="rect">
+            <a:avLst/>
+          </a:prstGeom>
+          <a:noFill/>
+        </p:spPr>
+        <p:txBody>
+          <a:bodyPr wrap="none" rtlCol="0">
+            <a:spAutoFit/>
+          </a:bodyPr>
+          <a:lstStyle/>
+          <a:p>
+            <a:r>
+              <a:rPr lang="en-US" altLang="ko-KR" dirty="0">
+                <a:solidFill>
+                  <a:schemeClr val="accent5"/>
+                </a:solidFill>
+                <a:hlinkClick r:id="rId3">
+                  <a:extLst>
+                    <a:ext uri="{A12FA001-AC4F-418D-AE19-62706E023703}">
+                      <ahyp:hlinkClr xmlns:ahyp="http://schemas.microsoft.com/office/drawing/2018/hyperlinkcolor" val="tx"/>
+                    </a:ext>
+                  </a:extLst>
+                </a:hlinkClick>
+              </a:rPr>
+              <a:t>Embedding Projector</a:t>
+            </a:r>
+            <a:endParaRPr lang="ko-KR" altLang="en-US" dirty="0">
+              <a:solidFill>
+                <a:schemeClr val="accent5"/>
+              </a:solidFill>
+            </a:endParaRPr>
+          </a:p>
+        </p:txBody>
+      </p:sp>
+      <p:sp>
+        <p:nvSpPr>
+          <p:cNvPr id="11" name="TextBox 10">
+            <a:extLst>
+              <a:ext uri="{FF2B5EF4-FFF2-40B4-BE49-F238E27FC236}">
+                <a16:creationId xmlns:a16="http://schemas.microsoft.com/office/drawing/2014/main" id="{3C781393-915C-0C49-25CB-595BCB55F9BB}"/>
+              </a:ext>
+            </a:extLst>
+          </p:cNvPr>
+          <p:cNvSpPr txBox="1"/>
+          <p:nvPr/>
+        </p:nvSpPr>
+        <p:spPr>
+          <a:xfrm>
+            <a:off x="7426960" y="4466245"/>
+            <a:ext cx="2283126" cy="369332"/>
+          </a:xfrm>
+          <a:prstGeom prst="rect">
+            <a:avLst/>
+          </a:prstGeom>
+          <a:noFill/>
+        </p:spPr>
+        <p:txBody>
+          <a:bodyPr wrap="none" rtlCol="0">
+            <a:spAutoFit/>
+          </a:bodyPr>
+          <a:lstStyle/>
+          <a:p>
+            <a:r>
+              <a:rPr lang="en-US" altLang="ko-KR" dirty="0">
+                <a:solidFill>
+                  <a:schemeClr val="accent5"/>
+                </a:solidFill>
+                <a:hlinkClick r:id="rId4">
+                  <a:extLst>
+                    <a:ext uri="{A12FA001-AC4F-418D-AE19-62706E023703}">
+                      <ahyp:hlinkClr xmlns:ahyp="http://schemas.microsoft.com/office/drawing/2018/hyperlinkcolor" val="tx"/>
+                    </a:ext>
+                  </a:extLst>
+                </a:hlinkClick>
+              </a:rPr>
+              <a:t>word2vec for Korean</a:t>
+            </a:r>
+            <a:endParaRPr lang="ko-KR" altLang="en-US" dirty="0">
+              <a:solidFill>
+                <a:schemeClr val="accent5"/>
+              </a:solidFill>
+            </a:endParaRPr>
+          </a:p>
+        </p:txBody>
+      </p:sp>
+    </p:spTree>
+    <p:extLst>
+      <p:ext uri="{BB962C8B-B14F-4D97-AF65-F5344CB8AC3E}">
+        <p14:creationId xmlns:p14="http://schemas.microsoft.com/office/powerpoint/2010/main" val="2537073889"/>
+      </p:ext>
+    </p:extLst>
+  </p:cSld>
+  <p:clrMapOvr>
+    <a:masterClrMapping/>
+  </p:clrMapOvr>
+</p:sld>
+</file>
+
+<file path=ppt/slides/slide15.xml><?xml version="1.0" encoding="utf-8"?>
+<p:sld xmlns:a="http://schemas.openxmlformats.org/drawingml/2006/main" xmlns:r="http://schemas.openxmlformats.org/officeDocument/2006/relationships" xmlns:p="http://schemas.openxmlformats.org/presentationml/2006/main">
+  <p:cSld>
+    <p:spTree>
+      <p:nvGrpSpPr>
+        <p:cNvPr id="1" name="">
+          <a:extLst>
+            <a:ext uri="{FF2B5EF4-FFF2-40B4-BE49-F238E27FC236}">
               <a16:creationId xmlns:a16="http://schemas.microsoft.com/office/drawing/2014/main" id="{2FE01420-D1DF-5D99-A5CE-1498AEE94557}"/>
             </a:ext>
           </a:extLst>
@@ -4705,7 +5165,7 @@
             <a:fld id="{D57F1E4F-1CFF-5643-939E-217C01CDF565}" type="slidenum">
               <a:rPr lang="en-US" smtClean="0"/>
               <a:pPr/>
-              <a:t>14</a:t>
+              <a:t>15</a:t>
             </a:fld>
             <a:endParaRPr lang="en-US" dirty="0"/>
           </a:p>

--- a/Chapter 14 Text classification.pptx
+++ b/Chapter 14 Text classification.pptx
@@ -272,7 +272,7 @@
                 <a:latin typeface="맑은 고딕" panose="020B0503020000020004" pitchFamily="50" charset="-127"/>
                 <a:ea typeface="맑은 고딕" panose="020B0503020000020004" pitchFamily="50" charset="-127"/>
               </a:rPr>
-              <a:t>2026-06-30</a:t>
+              <a:t>2026-08-15</a:t>
             </a:fld>
             <a:endParaRPr lang="ko-KR" altLang="en-US">
               <a:latin typeface="맑은 고딕" panose="020B0503020000020004" pitchFamily="50" charset="-127"/>
@@ -458,7 +458,7 @@
           <a:p>
             <a:fld id="{43E1C3DD-4A19-441D-907C-380838DB51C4}" type="datetime1">
               <a:rPr lang="ko-KR" altLang="en-US" noProof="0" smtClean="0"/>
-              <a:t>2026-06-30</a:t>
+              <a:t>2026-08-15</a:t>
             </a:fld>
             <a:endParaRPr lang="ko-KR" altLang="en-US" noProof="0"/>
           </a:p>
@@ -1306,7 +1306,7 @@
           <a:p>
             <a:fld id="{990475B5-67CA-4281-BDCA-DA943C3C8EB3}" type="datetime1">
               <a:rPr lang="ko-KR" altLang="en-US" noProof="0" smtClean="0"/>
-              <a:t>2026-06-30</a:t>
+              <a:t>2026-08-15</a:t>
             </a:fld>
             <a:endParaRPr lang="ko-KR" altLang="en-US" noProof="0"/>
           </a:p>
@@ -1960,7 +1960,7 @@
           <a:p>
             <a:fld id="{48A87A34-81AB-432B-8DAE-1953F412C126}" type="datetimeFigureOut">
               <a:rPr lang="en-US" smtClean="0"/>
-              <a:t>6/30/2026</a:t>
+              <a:t>8/15/2026</a:t>
             </a:fld>
             <a:endParaRPr lang="en-US" dirty="0"/>
           </a:p>
@@ -2256,7 +2256,7 @@
           <a:p>
             <a:fld id="{C655C81E-72E7-4D05-94B5-F45B321A525D}" type="datetime1">
               <a:rPr lang="ko-KR" altLang="en-US" noProof="0" smtClean="0"/>
-              <a:t>2026-06-30</a:t>
+              <a:t>2026-08-15</a:t>
             </a:fld>
             <a:endParaRPr lang="ko-KR" altLang="en-US" noProof="0" dirty="0">
               <a:latin typeface="맑은 고딕" panose="020B0503020000020004" pitchFamily="50" charset="-127"/>
@@ -3088,41 +3088,6 @@
       </p:pic>
       <p:sp>
         <p:nvSpPr>
-          <p:cNvPr id="4" name="슬라이드 번호 개체 틀 3">
-            <a:extLst>
-              <a:ext uri="{FF2B5EF4-FFF2-40B4-BE49-F238E27FC236}">
-                <a16:creationId xmlns:a16="http://schemas.microsoft.com/office/drawing/2014/main" id="{1C8CFB54-859B-DE48-C190-A1CF241BC4FC}"/>
-              </a:ext>
-            </a:extLst>
-          </p:cNvPr>
-          <p:cNvSpPr>
-            <a:spLocks noGrp="1"/>
-          </p:cNvSpPr>
-          <p:nvPr>
-            <p:ph type="sldNum" sz="quarter" idx="12"/>
-          </p:nvPr>
-        </p:nvSpPr>
-        <p:spPr>
-          <a:xfrm>
-            <a:off x="10514011" y="6036261"/>
-            <a:ext cx="753545" cy="365125"/>
-          </a:xfrm>
-        </p:spPr>
-        <p:txBody>
-          <a:bodyPr/>
-          <a:lstStyle/>
-          <a:p>
-            <a:fld id="{D57F1E4F-1CFF-5643-939E-217C01CDF565}" type="slidenum">
-              <a:rPr lang="en-US" smtClean="0"/>
-              <a:pPr/>
-              <a:t>10</a:t>
-            </a:fld>
-            <a:endParaRPr lang="en-US" dirty="0"/>
-          </a:p>
-        </p:txBody>
-      </p:sp>
-      <p:sp>
-        <p:nvSpPr>
           <p:cNvPr id="3" name="제목 1">
             <a:extLst>
               <a:ext uri="{FF2B5EF4-FFF2-40B4-BE49-F238E27FC236}">
@@ -3227,7 +3192,7 @@
         <p:spPr>
           <a:xfrm>
             <a:off x="7161595" y="2508280"/>
-            <a:ext cx="5409594" cy="646331"/>
+            <a:ext cx="5409594" cy="584775"/>
           </a:xfrm>
           <a:prstGeom prst="rect">
             <a:avLst/>
@@ -3242,14 +3207,14 @@
           <a:p>
             <a:pPr algn="ctr"/>
             <a:r>
-              <a:rPr lang="en-US" altLang="ko-KR" dirty="0" err="1">
+              <a:rPr lang="en-US" altLang="ko-KR" sz="1600" dirty="0" err="1">
                 <a:latin typeface="D2Coding" panose="020B0609020101020101" pitchFamily="49" charset="-127"/>
                 <a:ea typeface="D2Coding" panose="020B0609020101020101" pitchFamily="49" charset="-127"/>
               </a:rPr>
               <a:t>one_hot_encoding</a:t>
             </a:r>
             <a:r>
-              <a:rPr lang="en-US" altLang="ko-KR" dirty="0">
+              <a:rPr lang="en-US" altLang="ko-KR" sz="1600" dirty="0">
                 <a:latin typeface="D2Coding" panose="020B0609020101020101" pitchFamily="49" charset="-127"/>
                 <a:ea typeface="D2Coding" panose="020B0609020101020101" pitchFamily="49" charset="-127"/>
               </a:rPr>
@@ -3259,14 +3224,14 @@
           <a:p>
             <a:pPr algn="ctr"/>
             <a:r>
-              <a:rPr lang="en-US" altLang="ko-KR" dirty="0">
+              <a:rPr lang="en-US" altLang="ko-KR" sz="1600" dirty="0">
                 <a:latin typeface="D2Coding" panose="020B0609020101020101" pitchFamily="49" charset="-127"/>
                 <a:ea typeface="D2Coding" panose="020B0609020101020101" pitchFamily="49" charset="-127"/>
               </a:rPr>
               <a:t>(32, 600, 30000)</a:t>
             </a:r>
             <a:r>
-              <a:rPr lang="ko-KR" altLang="en-US" dirty="0">
+              <a:rPr lang="ko-KR" altLang="en-US" sz="1600" dirty="0">
                 <a:latin typeface="D2Coding" panose="020B0609020101020101" pitchFamily="49" charset="-127"/>
                 <a:ea typeface="D2Coding" panose="020B0609020101020101" pitchFamily="49" charset="-127"/>
               </a:rPr>
@@ -3309,7 +3274,7 @@
         </p:blipFill>
         <p:spPr>
           <a:xfrm>
-            <a:off x="585006" y="2009280"/>
+            <a:off x="364324" y="1890460"/>
             <a:ext cx="4666082" cy="1419719"/>
           </a:xfrm>
           <a:prstGeom prst="rect">
@@ -3331,8 +3296,8 @@
         </p:nvSpPr>
         <p:spPr>
           <a:xfrm>
-            <a:off x="0" y="1305685"/>
-            <a:ext cx="5409594" cy="646331"/>
+            <a:off x="364324" y="1480273"/>
+            <a:ext cx="5398010" cy="338554"/>
           </a:xfrm>
           <a:prstGeom prst="rect">
             <a:avLst/>
@@ -3347,42 +3312,35 @@
           <a:p>
             <a:pPr algn="ctr"/>
             <a:r>
-              <a:rPr lang="en-US" altLang="ko-KR" dirty="0" err="1">
+              <a:rPr lang="en-US" altLang="ko-KR" sz="1600" dirty="0" err="1">
                 <a:latin typeface="D2Coding" panose="020B0609020101020101" pitchFamily="49" charset="-127"/>
                 <a:ea typeface="D2Coding" panose="020B0609020101020101" pitchFamily="49" charset="-127"/>
               </a:rPr>
               <a:t>one_hot_encoding</a:t>
             </a:r>
             <a:r>
-              <a:rPr lang="en-US" altLang="ko-KR" dirty="0">
+              <a:rPr lang="en-US" altLang="ko-KR" sz="1600" dirty="0">
                 <a:latin typeface="D2Coding" panose="020B0609020101020101" pitchFamily="49" charset="-127"/>
                 <a:ea typeface="D2Coding" panose="020B0609020101020101" pitchFamily="49" charset="-127"/>
               </a:rPr>
               <a:t>(x) </a:t>
             </a:r>
             <a:r>
-              <a:rPr lang="ko-KR" altLang="en-US" dirty="0">
-                <a:latin typeface="D2Coding" panose="020B0609020101020101" pitchFamily="49" charset="-127"/>
-                <a:ea typeface="D2Coding" panose="020B0609020101020101" pitchFamily="49" charset="-127"/>
-              </a:rPr>
-              <a:t>적용 전</a:t>
-            </a:r>
-            <a:endParaRPr lang="en-US" altLang="ko-KR" dirty="0">
-              <a:latin typeface="D2Coding" panose="020B0609020101020101" pitchFamily="49" charset="-127"/>
-              <a:ea typeface="D2Coding" panose="020B0609020101020101" pitchFamily="49" charset="-127"/>
-            </a:endParaRPr>
-          </a:p>
-          <a:p>
-            <a:pPr algn="ctr"/>
-            <a:r>
-              <a:rPr lang="en-US" altLang="ko-KR" dirty="0">
+              <a:rPr lang="ko-KR" altLang="en-US" sz="1600" dirty="0">
+                <a:latin typeface="D2Coding" panose="020B0609020101020101" pitchFamily="49" charset="-127"/>
+                <a:ea typeface="D2Coding" panose="020B0609020101020101" pitchFamily="49" charset="-127"/>
+              </a:rPr>
+              <a:t>적용 전 </a:t>
+            </a:r>
+            <a:r>
+              <a:rPr lang="en-US" altLang="ko-KR" sz="1600" dirty="0">
                 <a:latin typeface="D2Coding" panose="020B0609020101020101" pitchFamily="49" charset="-127"/>
                 <a:ea typeface="D2Coding" panose="020B0609020101020101" pitchFamily="49" charset="-127"/>
               </a:rPr>
               <a:t>(32, 600)</a:t>
             </a:r>
             <a:r>
-              <a:rPr lang="ko-KR" altLang="en-US" dirty="0">
+              <a:rPr lang="ko-KR" altLang="en-US" sz="1600" dirty="0">
                 <a:latin typeface="D2Coding" panose="020B0609020101020101" pitchFamily="49" charset="-127"/>
                 <a:ea typeface="D2Coding" panose="020B0609020101020101" pitchFamily="49" charset="-127"/>
               </a:rPr>
@@ -3391,42 +3349,6 @@
           </a:p>
         </p:txBody>
       </p:sp>
-      <p:pic>
-        <p:nvPicPr>
-          <p:cNvPr id="42" name="그래픽 41" descr="조금 굽은 줄 화살표">
-            <a:extLst>
-              <a:ext uri="{FF2B5EF4-FFF2-40B4-BE49-F238E27FC236}">
-                <a16:creationId xmlns:a16="http://schemas.microsoft.com/office/drawing/2014/main" id="{DC61F7AC-D5D9-CE94-848B-47F37C6F6717}"/>
-              </a:ext>
-            </a:extLst>
-          </p:cNvPr>
-          <p:cNvPicPr>
-            <a:picLocks noChangeAspect="1"/>
-          </p:cNvPicPr>
-          <p:nvPr/>
-        </p:nvPicPr>
-        <p:blipFill>
-          <a:blip r:embed="rId6">
-            <a:extLst>
-              <a:ext uri="{96DAC541-7B7A-43D3-8B79-37D633B846F1}">
-                <asvg:svgBlip xmlns:asvg="http://schemas.microsoft.com/office/drawing/2016/SVG/main" r:embed="rId7"/>
-              </a:ext>
-            </a:extLst>
-          </a:blip>
-          <a:stretch>
-            <a:fillRect/>
-          </a:stretch>
-        </p:blipFill>
-        <p:spPr>
-          <a:xfrm rot="1022356">
-            <a:off x="5363781" y="2166213"/>
-            <a:ext cx="914400" cy="914400"/>
-          </a:xfrm>
-          <a:prstGeom prst="rect">
-            <a:avLst/>
-          </a:prstGeom>
-        </p:spPr>
-      </p:pic>
       <p:sp>
         <p:nvSpPr>
           <p:cNvPr id="43" name="TextBox 42">
@@ -3442,7 +3364,7 @@
         <p:spPr>
           <a:xfrm>
             <a:off x="611333" y="3428999"/>
-            <a:ext cx="2343614" cy="830997"/>
+            <a:ext cx="2343614" cy="738664"/>
           </a:xfrm>
           <a:prstGeom prst="rect">
             <a:avLst/>
@@ -3457,42 +3379,42 @@
           <a:p>
             <a:pPr algn="ctr"/>
             <a:r>
-              <a:rPr lang="ko-KR" altLang="en-US" sz="1600" dirty="0">
+              <a:rPr lang="ko-KR" altLang="en-US" sz="1400" dirty="0">
                 <a:latin typeface="D2Coding" panose="020B0609020101020101" pitchFamily="49" charset="-127"/>
                 <a:ea typeface="D2Coding" panose="020B0609020101020101" pitchFamily="49" charset="-127"/>
               </a:rPr>
               <a:t>영화 리뷰 </a:t>
             </a:r>
             <a:r>
-              <a:rPr lang="en-US" altLang="ko-KR" sz="1600" dirty="0">
+              <a:rPr lang="en-US" altLang="ko-KR" sz="1400" dirty="0">
                 <a:latin typeface="D2Coding" panose="020B0609020101020101" pitchFamily="49" charset="-127"/>
                 <a:ea typeface="D2Coding" panose="020B0609020101020101" pitchFamily="49" charset="-127"/>
               </a:rPr>
               <a:t>32</a:t>
             </a:r>
             <a:r>
-              <a:rPr lang="ko-KR" altLang="en-US" sz="1600" dirty="0">
+              <a:rPr lang="ko-KR" altLang="en-US" sz="1400" dirty="0">
                 <a:latin typeface="D2Coding" panose="020B0609020101020101" pitchFamily="49" charset="-127"/>
                 <a:ea typeface="D2Coding" panose="020B0609020101020101" pitchFamily="49" charset="-127"/>
               </a:rPr>
               <a:t>개 </a:t>
             </a:r>
             <a:r>
-              <a:rPr lang="en-US" altLang="ko-KR" sz="1600" dirty="0">
+              <a:rPr lang="en-US" altLang="ko-KR" sz="1400" dirty="0">
                 <a:latin typeface="D2Coding" panose="020B0609020101020101" pitchFamily="49" charset="-127"/>
                 <a:ea typeface="D2Coding" panose="020B0609020101020101" pitchFamily="49" charset="-127"/>
               </a:rPr>
               <a:t>(</a:t>
             </a:r>
             <a:r>
-              <a:rPr lang="ko-KR" altLang="en-US" sz="1600" dirty="0">
+              <a:rPr lang="ko-KR" altLang="en-US" sz="1400" dirty="0">
                 <a:latin typeface="D2Coding" panose="020B0609020101020101" pitchFamily="49" charset="-127"/>
                 <a:ea typeface="D2Coding" panose="020B0609020101020101" pitchFamily="49" charset="-127"/>
               </a:rPr>
               <a:t>행</a:t>
             </a:r>
             <a:r>
-              <a:rPr lang="en-US" altLang="ko-KR" sz="1600" dirty="0">
+              <a:rPr lang="en-US" altLang="ko-KR" sz="1400" dirty="0">
                 <a:latin typeface="D2Coding" panose="020B0609020101020101" pitchFamily="49" charset="-127"/>
                 <a:ea typeface="D2Coding" panose="020B0609020101020101" pitchFamily="49" charset="-127"/>
               </a:rPr>
@@ -3502,48 +3424,48 @@
           <a:p>
             <a:pPr algn="ctr"/>
             <a:r>
-              <a:rPr lang="ko-KR" altLang="en-US" sz="1600" dirty="0">
+              <a:rPr lang="ko-KR" altLang="en-US" sz="1400" dirty="0">
                 <a:latin typeface="D2Coding" panose="020B0609020101020101" pitchFamily="49" charset="-127"/>
                 <a:ea typeface="D2Coding" panose="020B0609020101020101" pitchFamily="49" charset="-127"/>
               </a:rPr>
               <a:t>각 리뷰당 들어있는 단어 </a:t>
             </a:r>
             <a:r>
-              <a:rPr lang="en-US" altLang="ko-KR" sz="1600" dirty="0">
+              <a:rPr lang="en-US" altLang="ko-KR" sz="1400" dirty="0">
                 <a:latin typeface="D2Coding" panose="020B0609020101020101" pitchFamily="49" charset="-127"/>
                 <a:ea typeface="D2Coding" panose="020B0609020101020101" pitchFamily="49" charset="-127"/>
               </a:rPr>
               <a:t>600</a:t>
             </a:r>
             <a:r>
-              <a:rPr lang="ko-KR" altLang="en-US" sz="1600" dirty="0">
+              <a:rPr lang="ko-KR" altLang="en-US" sz="1400" dirty="0">
                 <a:latin typeface="D2Coding" panose="020B0609020101020101" pitchFamily="49" charset="-127"/>
                 <a:ea typeface="D2Coding" panose="020B0609020101020101" pitchFamily="49" charset="-127"/>
               </a:rPr>
               <a:t>개 </a:t>
             </a:r>
             <a:r>
-              <a:rPr lang="en-US" altLang="ko-KR" sz="1600" dirty="0">
+              <a:rPr lang="en-US" altLang="ko-KR" sz="1400" dirty="0">
                 <a:latin typeface="D2Coding" panose="020B0609020101020101" pitchFamily="49" charset="-127"/>
                 <a:ea typeface="D2Coding" panose="020B0609020101020101" pitchFamily="49" charset="-127"/>
               </a:rPr>
               <a:t>(</a:t>
             </a:r>
             <a:r>
-              <a:rPr lang="ko-KR" altLang="en-US" sz="1600" dirty="0">
+              <a:rPr lang="ko-KR" altLang="en-US" sz="1400" dirty="0">
                 <a:latin typeface="D2Coding" panose="020B0609020101020101" pitchFamily="49" charset="-127"/>
                 <a:ea typeface="D2Coding" panose="020B0609020101020101" pitchFamily="49" charset="-127"/>
               </a:rPr>
               <a:t>열</a:t>
             </a:r>
             <a:r>
-              <a:rPr lang="en-US" altLang="ko-KR" sz="1600" dirty="0">
+              <a:rPr lang="en-US" altLang="ko-KR" sz="1400" dirty="0">
                 <a:latin typeface="D2Coding" panose="020B0609020101020101" pitchFamily="49" charset="-127"/>
                 <a:ea typeface="D2Coding" panose="020B0609020101020101" pitchFamily="49" charset="-127"/>
               </a:rPr>
               <a:t>)</a:t>
             </a:r>
-            <a:endParaRPr lang="ko-KR" altLang="en-US" sz="1600" dirty="0">
+            <a:endParaRPr lang="ko-KR" altLang="en-US" sz="1400" dirty="0">
               <a:latin typeface="D2Coding" panose="020B0609020101020101" pitchFamily="49" charset="-127"/>
               <a:ea typeface="D2Coding" panose="020B0609020101020101" pitchFamily="49" charset="-127"/>
             </a:endParaRPr>
@@ -3565,7 +3487,7 @@
           <p:nvPr/>
         </p:nvPicPr>
         <p:blipFill>
-          <a:blip r:embed="rId8">
+          <a:blip r:embed="rId6">
             <a:duotone>
               <a:prstClr val="black"/>
               <a:schemeClr val="accent2">
@@ -3579,9 +3501,45 @@
           </a:stretch>
         </p:blipFill>
         <p:spPr>
-          <a:xfrm rot="944975">
-            <a:off x="4493512" y="1885273"/>
+          <a:xfrm rot="955337">
+            <a:off x="4430505" y="2408399"/>
             <a:ext cx="3425659" cy="391777"/>
+          </a:xfrm>
+          <a:prstGeom prst="rect">
+            <a:avLst/>
+          </a:prstGeom>
+        </p:spPr>
+      </p:pic>
+      <p:pic>
+        <p:nvPicPr>
+          <p:cNvPr id="5" name="그래픽 4" descr="조금 굽은 화살표">
+            <a:extLst>
+              <a:ext uri="{FF2B5EF4-FFF2-40B4-BE49-F238E27FC236}">
+                <a16:creationId xmlns:a16="http://schemas.microsoft.com/office/drawing/2014/main" id="{74938B72-534C-C6A6-72CF-48F8B3F97AC7}"/>
+              </a:ext>
+            </a:extLst>
+          </p:cNvPr>
+          <p:cNvPicPr>
+            <a:picLocks noChangeAspect="1"/>
+          </p:cNvPicPr>
+          <p:nvPr/>
+        </p:nvPicPr>
+        <p:blipFill>
+          <a:blip r:embed="rId7">
+            <a:extLst>
+              <a:ext uri="{96DAC541-7B7A-43D3-8B79-37D633B846F1}">
+                <asvg:svgBlip xmlns:asvg="http://schemas.microsoft.com/office/drawing/2016/SVG/main" r:embed="rId8"/>
+              </a:ext>
+            </a:extLst>
+          </a:blip>
+          <a:stretch>
+            <a:fillRect/>
+          </a:stretch>
+        </p:blipFill>
+        <p:spPr>
+          <a:xfrm rot="922006">
+            <a:off x="4665318" y="2570210"/>
+            <a:ext cx="914400" cy="914400"/>
           </a:xfrm>
           <a:prstGeom prst="rect">
             <a:avLst/>
@@ -6364,7 +6322,7 @@
         <p:spPr>
           <a:xfrm>
             <a:off x="568960" y="1478012"/>
-            <a:ext cx="11186160" cy="3055324"/>
+            <a:ext cx="11186160" cy="4163319"/>
           </a:xfrm>
           <a:prstGeom prst="rect">
             <a:avLst/>
@@ -6442,97 +6400,6 @@
               <a:buFont typeface="Wingdings" panose="05000000000000000000" pitchFamily="2" charset="2"/>
               <a:buChar char="v"/>
             </a:pPr>
-            <a:r>
-              <a:rPr lang="ko-KR" altLang="en-US" sz="1600" dirty="0">
-                <a:latin typeface="D2Coding" panose="020B0609020101020101" pitchFamily="49" charset="-127"/>
-                <a:ea typeface="D2Coding" panose="020B0609020101020101" pitchFamily="49" charset="-127"/>
-              </a:rPr>
-              <a:t>트랜스포머 아키텍처 </a:t>
-            </a:r>
-            <a:r>
-              <a:rPr lang="en-US" altLang="ko-KR" sz="1600" dirty="0">
-                <a:latin typeface="D2Coding" panose="020B0609020101020101" pitchFamily="49" charset="-127"/>
-                <a:ea typeface="D2Coding" panose="020B0609020101020101" pitchFamily="49" charset="-127"/>
-              </a:rPr>
-              <a:t>(2017</a:t>
-            </a:r>
-            <a:r>
-              <a:rPr lang="ko-KR" altLang="en-US" sz="1600" dirty="0">
-                <a:latin typeface="D2Coding" panose="020B0609020101020101" pitchFamily="49" charset="-127"/>
-                <a:ea typeface="D2Coding" panose="020B0609020101020101" pitchFamily="49" charset="-127"/>
-              </a:rPr>
-              <a:t>년</a:t>
-            </a:r>
-            <a:r>
-              <a:rPr lang="en-US" altLang="ko-KR" sz="1600" dirty="0">
-                <a:latin typeface="D2Coding" panose="020B0609020101020101" pitchFamily="49" charset="-127"/>
-                <a:ea typeface="D2Coding" panose="020B0609020101020101" pitchFamily="49" charset="-127"/>
-              </a:rPr>
-              <a:t>):</a:t>
-            </a:r>
-            <a:r>
-              <a:rPr lang="ko-KR" altLang="en-US" sz="1600" dirty="0">
-                <a:latin typeface="D2Coding" panose="020B0609020101020101" pitchFamily="49" charset="-127"/>
-                <a:ea typeface="D2Coding" panose="020B0609020101020101" pitchFamily="49" charset="-127"/>
-              </a:rPr>
-              <a:t> 긴 문맥을 왜곡 없이 기억하면서도</a:t>
-            </a:r>
-            <a:r>
-              <a:rPr lang="en-US" altLang="ko-KR" sz="1600" dirty="0">
-                <a:latin typeface="D2Coding" panose="020B0609020101020101" pitchFamily="49" charset="-127"/>
-                <a:ea typeface="D2Coding" panose="020B0609020101020101" pitchFamily="49" charset="-127"/>
-              </a:rPr>
-              <a:t>, </a:t>
-            </a:r>
-            <a:r>
-              <a:rPr lang="ko-KR" altLang="en-US" sz="1600" dirty="0">
-                <a:latin typeface="D2Coding" panose="020B0609020101020101" pitchFamily="49" charset="-127"/>
-                <a:ea typeface="D2Coding" panose="020B0609020101020101" pitchFamily="49" charset="-127"/>
-              </a:rPr>
-              <a:t>대규모 병렬 연산</a:t>
-            </a:r>
-            <a:r>
-              <a:rPr lang="en-US" altLang="ko-KR" sz="1600" dirty="0">
-                <a:latin typeface="D2Coding" panose="020B0609020101020101" pitchFamily="49" charset="-127"/>
-                <a:ea typeface="D2Coding" panose="020B0609020101020101" pitchFamily="49" charset="-127"/>
-              </a:rPr>
-              <a:t>(GPU/CPU </a:t>
-            </a:r>
-            <a:r>
-              <a:rPr lang="ko-KR" altLang="en-US" sz="1600" dirty="0">
-                <a:latin typeface="D2Coding" panose="020B0609020101020101" pitchFamily="49" charset="-127"/>
-                <a:ea typeface="D2Coding" panose="020B0609020101020101" pitchFamily="49" charset="-127"/>
-              </a:rPr>
-              <a:t>활용</a:t>
-            </a:r>
-            <a:r>
-              <a:rPr lang="en-US" altLang="ko-KR" sz="1600" dirty="0">
-                <a:latin typeface="D2Coding" panose="020B0609020101020101" pitchFamily="49" charset="-127"/>
-                <a:ea typeface="D2Coding" panose="020B0609020101020101" pitchFamily="49" charset="-127"/>
-              </a:rPr>
-              <a:t>)</a:t>
-            </a:r>
-            <a:r>
-              <a:rPr lang="ko-KR" altLang="en-US" sz="1600" dirty="0">
-                <a:latin typeface="D2Coding" panose="020B0609020101020101" pitchFamily="49" charset="-127"/>
-                <a:ea typeface="D2Coding" panose="020B0609020101020101" pitchFamily="49" charset="-127"/>
-              </a:rPr>
-              <a:t>이 가능하여 </a:t>
-            </a:r>
-            <a:r>
-              <a:rPr lang="en-US" altLang="ko-KR" sz="1600" dirty="0">
-                <a:latin typeface="D2Coding" panose="020B0609020101020101" pitchFamily="49" charset="-127"/>
-                <a:ea typeface="D2Coding" panose="020B0609020101020101" pitchFamily="49" charset="-127"/>
-              </a:rPr>
-              <a:t>LSTM</a:t>
-            </a:r>
-            <a:r>
-              <a:rPr lang="ko-KR" altLang="en-US" sz="1600" dirty="0">
-                <a:latin typeface="D2Coding" panose="020B0609020101020101" pitchFamily="49" charset="-127"/>
-                <a:ea typeface="D2Coding" panose="020B0609020101020101" pitchFamily="49" charset="-127"/>
-              </a:rPr>
-              <a:t>의 확장성 한계를 완벽히 해결</a:t>
-            </a:r>
             <a:endParaRPr lang="en-US" altLang="ko-KR" sz="1600" dirty="0">
               <a:latin typeface="D2Coding" panose="020B0609020101020101" pitchFamily="49" charset="-127"/>
               <a:ea typeface="D2Coding" panose="020B0609020101020101" pitchFamily="49" charset="-127"/>
@@ -6551,6 +6418,123 @@
                 <a:latin typeface="D2Coding" panose="020B0609020101020101" pitchFamily="49" charset="-127"/>
                 <a:ea typeface="D2Coding" panose="020B0609020101020101" pitchFamily="49" charset="-127"/>
               </a:rPr>
+              <a:t>트랜스포머 아키텍처 </a:t>
+            </a:r>
+            <a:r>
+              <a:rPr lang="en-US" altLang="ko-KR" sz="1600" dirty="0">
+                <a:latin typeface="D2Coding" panose="020B0609020101020101" pitchFamily="49" charset="-127"/>
+                <a:ea typeface="D2Coding" panose="020B0609020101020101" pitchFamily="49" charset="-127"/>
+              </a:rPr>
+              <a:t>(2017</a:t>
+            </a:r>
+            <a:r>
+              <a:rPr lang="ko-KR" altLang="en-US" sz="1600" dirty="0">
+                <a:latin typeface="D2Coding" panose="020B0609020101020101" pitchFamily="49" charset="-127"/>
+                <a:ea typeface="D2Coding" panose="020B0609020101020101" pitchFamily="49" charset="-127"/>
+              </a:rPr>
+              <a:t>년</a:t>
+            </a:r>
+            <a:r>
+              <a:rPr lang="en-US" altLang="ko-KR" sz="1600" dirty="0">
+                <a:latin typeface="D2Coding" panose="020B0609020101020101" pitchFamily="49" charset="-127"/>
+                <a:ea typeface="D2Coding" panose="020B0609020101020101" pitchFamily="49" charset="-127"/>
+              </a:rPr>
+              <a:t>):</a:t>
+            </a:r>
+            <a:r>
+              <a:rPr lang="ko-KR" altLang="en-US" sz="1600" dirty="0">
+                <a:latin typeface="D2Coding" panose="020B0609020101020101" pitchFamily="49" charset="-127"/>
+                <a:ea typeface="D2Coding" panose="020B0609020101020101" pitchFamily="49" charset="-127"/>
+              </a:rPr>
+              <a:t> 긴 문맥을 왜곡 없이 기억하면서도</a:t>
+            </a:r>
+            <a:r>
+              <a:rPr lang="en-US" altLang="ko-KR" sz="1600" dirty="0">
+                <a:latin typeface="D2Coding" panose="020B0609020101020101" pitchFamily="49" charset="-127"/>
+                <a:ea typeface="D2Coding" panose="020B0609020101020101" pitchFamily="49" charset="-127"/>
+              </a:rPr>
+              <a:t>, </a:t>
+            </a:r>
+            <a:r>
+              <a:rPr lang="ko-KR" altLang="en-US" sz="1600" dirty="0">
+                <a:latin typeface="D2Coding" panose="020B0609020101020101" pitchFamily="49" charset="-127"/>
+                <a:ea typeface="D2Coding" panose="020B0609020101020101" pitchFamily="49" charset="-127"/>
+              </a:rPr>
+              <a:t>대규모 병렬 연산</a:t>
+            </a:r>
+            <a:r>
+              <a:rPr lang="en-US" altLang="ko-KR" sz="1600" dirty="0">
+                <a:latin typeface="D2Coding" panose="020B0609020101020101" pitchFamily="49" charset="-127"/>
+                <a:ea typeface="D2Coding" panose="020B0609020101020101" pitchFamily="49" charset="-127"/>
+              </a:rPr>
+              <a:t>(GPU/CPU </a:t>
+            </a:r>
+            <a:r>
+              <a:rPr lang="ko-KR" altLang="en-US" sz="1600" dirty="0">
+                <a:latin typeface="D2Coding" panose="020B0609020101020101" pitchFamily="49" charset="-127"/>
+                <a:ea typeface="D2Coding" panose="020B0609020101020101" pitchFamily="49" charset="-127"/>
+              </a:rPr>
+              <a:t>활용</a:t>
+            </a:r>
+            <a:r>
+              <a:rPr lang="en-US" altLang="ko-KR" sz="1600" dirty="0">
+                <a:latin typeface="D2Coding" panose="020B0609020101020101" pitchFamily="49" charset="-127"/>
+                <a:ea typeface="D2Coding" panose="020B0609020101020101" pitchFamily="49" charset="-127"/>
+              </a:rPr>
+              <a:t>)</a:t>
+            </a:r>
+            <a:r>
+              <a:rPr lang="ko-KR" altLang="en-US" sz="1600" dirty="0">
+                <a:latin typeface="D2Coding" panose="020B0609020101020101" pitchFamily="49" charset="-127"/>
+                <a:ea typeface="D2Coding" panose="020B0609020101020101" pitchFamily="49" charset="-127"/>
+              </a:rPr>
+              <a:t>이 가능하여 </a:t>
+            </a:r>
+            <a:r>
+              <a:rPr lang="en-US" altLang="ko-KR" sz="1600" dirty="0">
+                <a:latin typeface="D2Coding" panose="020B0609020101020101" pitchFamily="49" charset="-127"/>
+                <a:ea typeface="D2Coding" panose="020B0609020101020101" pitchFamily="49" charset="-127"/>
+              </a:rPr>
+              <a:t>LSTM</a:t>
+            </a:r>
+            <a:r>
+              <a:rPr lang="ko-KR" altLang="en-US" sz="1600" dirty="0">
+                <a:latin typeface="D2Coding" panose="020B0609020101020101" pitchFamily="49" charset="-127"/>
+                <a:ea typeface="D2Coding" panose="020B0609020101020101" pitchFamily="49" charset="-127"/>
+              </a:rPr>
+              <a:t>의 확장성 한계를 완벽히 해결</a:t>
+            </a:r>
+            <a:endParaRPr lang="en-US" altLang="ko-KR" sz="1600" dirty="0">
+              <a:latin typeface="D2Coding" panose="020B0609020101020101" pitchFamily="49" charset="-127"/>
+              <a:ea typeface="D2Coding" panose="020B0609020101020101" pitchFamily="49" charset="-127"/>
+            </a:endParaRPr>
+          </a:p>
+          <a:p>
+            <a:pPr marL="742950" lvl="1" indent="-285750">
+              <a:lnSpc>
+                <a:spcPct val="150000"/>
+              </a:lnSpc>
+              <a:buFont typeface="Wingdings" panose="05000000000000000000" pitchFamily="2" charset="2"/>
+              <a:buChar char="v"/>
+            </a:pPr>
+            <a:endParaRPr lang="en-US" altLang="ko-KR" sz="1600" dirty="0">
+              <a:latin typeface="D2Coding" panose="020B0609020101020101" pitchFamily="49" charset="-127"/>
+              <a:ea typeface="D2Coding" panose="020B0609020101020101" pitchFamily="49" charset="-127"/>
+            </a:endParaRPr>
+          </a:p>
+          <a:p>
+            <a:pPr marL="742950" lvl="1" indent="-285750">
+              <a:lnSpc>
+                <a:spcPct val="150000"/>
+              </a:lnSpc>
+              <a:buFont typeface="Wingdings" panose="05000000000000000000" pitchFamily="2" charset="2"/>
+              <a:buChar char="v"/>
+            </a:pPr>
+            <a:r>
+              <a:rPr lang="ko-KR" altLang="en-US" sz="1600" dirty="0">
+                <a:latin typeface="D2Coding" panose="020B0609020101020101" pitchFamily="49" charset="-127"/>
+                <a:ea typeface="D2Coding" panose="020B0609020101020101" pitchFamily="49" charset="-127"/>
+              </a:rPr>
               <a:t>거대 생성형 </a:t>
             </a:r>
             <a:r>
@@ -6595,6 +6579,19 @@
               </a:rPr>
               <a:t>등의 거대 언어 모델이 탄생</a:t>
             </a:r>
+            <a:endParaRPr lang="en-US" altLang="ko-KR" sz="1600" dirty="0">
+              <a:latin typeface="D2Coding" panose="020B0609020101020101" pitchFamily="49" charset="-127"/>
+              <a:ea typeface="D2Coding" panose="020B0609020101020101" pitchFamily="49" charset="-127"/>
+            </a:endParaRPr>
+          </a:p>
+          <a:p>
+            <a:pPr marL="742950" lvl="1" indent="-285750">
+              <a:lnSpc>
+                <a:spcPct val="150000"/>
+              </a:lnSpc>
+              <a:buFont typeface="Wingdings" panose="05000000000000000000" pitchFamily="2" charset="2"/>
+              <a:buChar char="v"/>
+            </a:pPr>
             <a:endParaRPr lang="en-US" altLang="ko-KR" sz="1600" dirty="0">
               <a:latin typeface="D2Coding" panose="020B0609020101020101" pitchFamily="49" charset="-127"/>
               <a:ea typeface="D2Coding" panose="020B0609020101020101" pitchFamily="49" charset="-127"/>
